--- a/dist/초1/체육·보건·안전/몸과마음/초1_체육·보건·안전_몸과마음_01_손씻기와몸의경계_학생용.pptx
+++ b/dist/초1/체육·보건·안전/몸과마음/초1_체육·보건·안전_몸과마음_01_손씻기와몸의경계_학생용.pptx
@@ -119,13 +119,13 @@
   <p:extLst>
     <p:ext uri="{521415D9-36F7-43E2-AB2F-B90AF26B5E84}">
       <p14:sectionLst xmlns:p14="http://schemas.microsoft.com/office/powerpoint/2010/main">
-        <p14:section name="도입" id="{417fc912-9dcd-f085-c9eb-a11021bdafe2}">
+        <p14:section name="도입" id="{e0d340d1-e6c3-8103-1d1f-5523fbc2a75f}">
           <p14:sldIdLst>
             <p14:sldId id="256"/>
             <p14:sldId id="257"/>
           </p14:sldIdLst>
         </p14:section>
-        <p14:section name="개념" id="{ea09717d-e529-dc8c-994d-cc19e9a4bfc1}">
+        <p14:section name="개념" id="{f0295b71-170e-ad64-29b9-653b9f1649e7}">
           <p14:sldIdLst>
             <p14:sldId id="258"/>
             <p14:sldId id="259"/>
@@ -134,36 +134,36 @@
             <p14:sldId id="264"/>
           </p14:sldIdLst>
         </p14:section>
-        <p14:section name="연습" id="{494b8bd7-9777-85a3-88cd-9d2f47030fe5}">
+        <p14:section name="연습" id="{91605db8-1bd8-104b-3678-2e89efdebca4}">
           <p14:sldIdLst>
             <p14:sldId id="260"/>
             <p14:sldId id="262"/>
             <p14:sldId id="265"/>
           </p14:sldIdLst>
         </p14:section>
-        <p14:section name="개념" id="{92ec2b9d-5d5d-6870-e230-9c41672cbe90}">
+        <p14:section name="개념" id="{9a4d0285-0119-397d-c718-8f81b0600770}">
           <p14:sldIdLst/>
         </p14:section>
-        <p14:section name="연습" id="{9ea817cc-d838-4a1a-cf22-51d710afe06b}">
+        <p14:section name="연습" id="{1a86f1bb-565c-5ecf-035f-71d5061e2d57}">
           <p14:sldIdLst/>
         </p14:section>
-        <p14:section name="개념" id="{9c66eb87-76bb-78f1-188d-b878cdf6aee4}">
+        <p14:section name="개념" id="{ab3e37af-e84d-3e66-a2d5-aed7b85b1849}">
           <p14:sldIdLst/>
         </p14:section>
-        <p14:section name="연습" id="{229670f1-f1a0-29f8-ac07-7dfe0e909efe}">
+        <p14:section name="연습" id="{12d32a8f-02c7-1ba4-f8e0-a40baf446bdc}">
           <p14:sldIdLst/>
         </p14:section>
-        <p14:section name="확인" id="{63de81e8-4149-2520-6ac5-b9a58a5212e9}">
+        <p14:section name="확인" id="{b765267f-a6c3-553c-473a-f254b8a1f935}">
           <p14:sldIdLst>
             <p14:sldId id="266"/>
           </p14:sldIdLst>
         </p14:section>
-        <p14:section name="정리" id="{1210aa41-0a75-3811-39a0-45403a4943af}">
+        <p14:section name="정리" id="{27a98a58-eefe-16c3-e6d6-ee7b3fcb0268}">
           <p14:sldIdLst>
             <p14:sldId id="267"/>
           </p14:sldIdLst>
         </p14:section>
-        <p14:section name="보충" id="{a2b98187-b9ee-b4ab-4c0d-4fa12e740aba}">
+        <p14:section name="보충" id="{66f1a4fa-0c28-8d16-5f34-9d558a8bdc7b}">
           <p14:sldIdLst>
             <p14:sldId id="268"/>
           </p14:sldIdLst>
